--- a/002 Presentation/캡스톤1-계획발표-FrameRUN.pptx
+++ b/002 Presentation/캡스톤1-계획발표-FrameRUN.pptx
@@ -255,7 +255,7 @@
           <a:p>
             <a:fld id="{D88FD2F9-BA9E-4FC7-A7D0-A715EE974A7C}" type="datetimeFigureOut">
               <a:rPr lang="ko-KR" altLang="en-US" smtClean="0"/>
-              <a:t>2023-06-09</a:t>
+              <a:t>2026-03-25</a:t>
             </a:fld>
             <a:endParaRPr lang="ko-KR" altLang="en-US"/>
           </a:p>
@@ -3894,7 +3894,7 @@
           <a:p>
             <a:fld id="{E4A422C8-24D4-41BF-867D-974FC0EF2211}" type="datetimeFigureOut">
               <a:rPr lang="ko-KR" altLang="en-US" smtClean="0"/>
-              <a:t>2023-06-09</a:t>
+              <a:t>2026-03-25</a:t>
             </a:fld>
             <a:endParaRPr lang="ko-KR" altLang="en-US"/>
           </a:p>
@@ -4092,7 +4092,7 @@
           <a:p>
             <a:fld id="{E4A422C8-24D4-41BF-867D-974FC0EF2211}" type="datetimeFigureOut">
               <a:rPr lang="ko-KR" altLang="en-US" smtClean="0"/>
-              <a:t>2023-06-09</a:t>
+              <a:t>2026-03-25</a:t>
             </a:fld>
             <a:endParaRPr lang="ko-KR" altLang="en-US"/>
           </a:p>
@@ -4300,7 +4300,7 @@
           <a:p>
             <a:fld id="{E4A422C8-24D4-41BF-867D-974FC0EF2211}" type="datetimeFigureOut">
               <a:rPr lang="ko-KR" altLang="en-US" smtClean="0"/>
-              <a:t>2023-06-09</a:t>
+              <a:t>2026-03-25</a:t>
             </a:fld>
             <a:endParaRPr lang="ko-KR" altLang="en-US"/>
           </a:p>
@@ -4498,7 +4498,7 @@
           <a:p>
             <a:fld id="{E4A422C8-24D4-41BF-867D-974FC0EF2211}" type="datetimeFigureOut">
               <a:rPr lang="ko-KR" altLang="en-US" smtClean="0"/>
-              <a:t>2023-06-09</a:t>
+              <a:t>2026-03-25</a:t>
             </a:fld>
             <a:endParaRPr lang="ko-KR" altLang="en-US"/>
           </a:p>
@@ -4773,7 +4773,7 @@
           <a:p>
             <a:fld id="{E4A422C8-24D4-41BF-867D-974FC0EF2211}" type="datetimeFigureOut">
               <a:rPr lang="ko-KR" altLang="en-US" smtClean="0"/>
-              <a:t>2023-06-09</a:t>
+              <a:t>2026-03-25</a:t>
             </a:fld>
             <a:endParaRPr lang="ko-KR" altLang="en-US"/>
           </a:p>
@@ -5038,7 +5038,7 @@
           <a:p>
             <a:fld id="{E4A422C8-24D4-41BF-867D-974FC0EF2211}" type="datetimeFigureOut">
               <a:rPr lang="ko-KR" altLang="en-US" smtClean="0"/>
-              <a:t>2023-06-09</a:t>
+              <a:t>2026-03-25</a:t>
             </a:fld>
             <a:endParaRPr lang="ko-KR" altLang="en-US"/>
           </a:p>
@@ -5450,7 +5450,7 @@
           <a:p>
             <a:fld id="{E4A422C8-24D4-41BF-867D-974FC0EF2211}" type="datetimeFigureOut">
               <a:rPr lang="ko-KR" altLang="en-US" smtClean="0"/>
-              <a:t>2023-06-09</a:t>
+              <a:t>2026-03-25</a:t>
             </a:fld>
             <a:endParaRPr lang="ko-KR" altLang="en-US"/>
           </a:p>
@@ -5591,7 +5591,7 @@
           <a:p>
             <a:fld id="{E4A422C8-24D4-41BF-867D-974FC0EF2211}" type="datetimeFigureOut">
               <a:rPr lang="ko-KR" altLang="en-US" smtClean="0"/>
-              <a:t>2023-06-09</a:t>
+              <a:t>2026-03-25</a:t>
             </a:fld>
             <a:endParaRPr lang="ko-KR" altLang="en-US"/>
           </a:p>
@@ -5704,7 +5704,7 @@
           <a:p>
             <a:fld id="{E4A422C8-24D4-41BF-867D-974FC0EF2211}" type="datetimeFigureOut">
               <a:rPr lang="ko-KR" altLang="en-US" smtClean="0"/>
-              <a:t>2023-06-09</a:t>
+              <a:t>2026-03-25</a:t>
             </a:fld>
             <a:endParaRPr lang="ko-KR" altLang="en-US"/>
           </a:p>
@@ -6015,7 +6015,7 @@
           <a:p>
             <a:fld id="{E4A422C8-24D4-41BF-867D-974FC0EF2211}" type="datetimeFigureOut">
               <a:rPr lang="ko-KR" altLang="en-US" smtClean="0"/>
-              <a:t>2023-06-09</a:t>
+              <a:t>2026-03-25</a:t>
             </a:fld>
             <a:endParaRPr lang="ko-KR" altLang="en-US"/>
           </a:p>
@@ -6303,7 +6303,7 @@
           <a:p>
             <a:fld id="{E4A422C8-24D4-41BF-867D-974FC0EF2211}" type="datetimeFigureOut">
               <a:rPr lang="ko-KR" altLang="en-US" smtClean="0"/>
-              <a:t>2023-06-09</a:t>
+              <a:t>2026-03-25</a:t>
             </a:fld>
             <a:endParaRPr lang="ko-KR" altLang="en-US"/>
           </a:p>
@@ -6544,7 +6544,7 @@
           <a:p>
             <a:fld id="{E4A422C8-24D4-41BF-867D-974FC0EF2211}" type="datetimeFigureOut">
               <a:rPr lang="ko-KR" altLang="en-US" smtClean="0"/>
-              <a:t>2023-06-09</a:t>
+              <a:t>2026-03-25</a:t>
             </a:fld>
             <a:endParaRPr lang="ko-KR" altLang="en-US"/>
           </a:p>
@@ -7195,108 +7195,6 @@
           </a:fontRef>
         </p:style>
       </p:cxnSp>
-      <p:sp>
-        <p:nvSpPr>
-          <p:cNvPr id="12" name="TextBox 11">
-            <a:extLst>
-              <a:ext uri="{FF2B5EF4-FFF2-40B4-BE49-F238E27FC236}">
-                <a16:creationId xmlns:a16="http://schemas.microsoft.com/office/drawing/2014/main" id="{D3214AE5-3333-429E-B51D-7A6516CFC740}"/>
-              </a:ext>
-            </a:extLst>
-          </p:cNvPr>
-          <p:cNvSpPr txBox="1"/>
-          <p:nvPr/>
-        </p:nvSpPr>
-        <p:spPr>
-          <a:xfrm>
-            <a:off x="3526790" y="3091239"/>
-            <a:ext cx="2037687" cy="584775"/>
-          </a:xfrm>
-          <a:prstGeom prst="rect">
-            <a:avLst/>
-          </a:prstGeom>
-          <a:noFill/>
-        </p:spPr>
-        <p:txBody>
-          <a:bodyPr wrap="square" rtlCol="0">
-            <a:spAutoFit/>
-          </a:bodyPr>
-          <a:lstStyle/>
-          <a:p>
-            <a:pPr algn="r"/>
-            <a:r>
-              <a:rPr lang="ko-KR" altLang="en-US" sz="1600" spc="-150" dirty="0">
-                <a:latin typeface="에스코어 드림 3 Light" panose="020B0303030302020204" pitchFamily="34" charset="-127"/>
-                <a:ea typeface="에스코어 드림 3 Light" panose="020B0303030302020204" pitchFamily="34" charset="-127"/>
-              </a:rPr>
-              <a:t>구나영</a:t>
-            </a:r>
-            <a:r>
-              <a:rPr lang="en-US" altLang="ko-KR" sz="1600" spc="-150" dirty="0">
-                <a:latin typeface="에스코어 드림 3 Light" panose="020B0303030302020204" pitchFamily="34" charset="-127"/>
-                <a:ea typeface="에스코어 드림 3 Light" panose="020B0303030302020204" pitchFamily="34" charset="-127"/>
-              </a:rPr>
-              <a:t>  </a:t>
-            </a:r>
-            <a:r>
-              <a:rPr lang="ko-KR" altLang="en-US" sz="1600" spc="-150" dirty="0" err="1">
-                <a:latin typeface="에스코어 드림 3 Light" panose="020B0303030302020204" pitchFamily="34" charset="-127"/>
-                <a:ea typeface="에스코어 드림 3 Light" panose="020B0303030302020204" pitchFamily="34" charset="-127"/>
-              </a:rPr>
-              <a:t>고수연</a:t>
-            </a:r>
-            <a:r>
-              <a:rPr lang="en-US" altLang="ko-KR" sz="1600" spc="-150" dirty="0">
-                <a:latin typeface="에스코어 드림 3 Light" panose="020B0303030302020204" pitchFamily="34" charset="-127"/>
-                <a:ea typeface="에스코어 드림 3 Light" panose="020B0303030302020204" pitchFamily="34" charset="-127"/>
-              </a:rPr>
-              <a:t>  </a:t>
-            </a:r>
-            <a:r>
-              <a:rPr lang="ko-KR" altLang="en-US" sz="1600" spc="-150" dirty="0" err="1">
-                <a:latin typeface="에스코어 드림 3 Light" panose="020B0303030302020204" pitchFamily="34" charset="-127"/>
-                <a:ea typeface="에스코어 드림 3 Light" panose="020B0303030302020204" pitchFamily="34" charset="-127"/>
-              </a:rPr>
-              <a:t>송가은</a:t>
-            </a:r>
-            <a:r>
-              <a:rPr lang="ko-KR" altLang="en-US" sz="1600" spc="-150" dirty="0">
-                <a:latin typeface="에스코어 드림 3 Light" panose="020B0303030302020204" pitchFamily="34" charset="-127"/>
-                <a:ea typeface="에스코어 드림 3 Light" panose="020B0303030302020204" pitchFamily="34" charset="-127"/>
-              </a:rPr>
-              <a:t> </a:t>
-            </a:r>
-            <a:endParaRPr lang="en-US" altLang="ko-KR" sz="1600" spc="-150" dirty="0">
-              <a:latin typeface="에스코어 드림 3 Light" panose="020B0303030302020204" pitchFamily="34" charset="-127"/>
-              <a:ea typeface="에스코어 드림 3 Light" panose="020B0303030302020204" pitchFamily="34" charset="-127"/>
-            </a:endParaRPr>
-          </a:p>
-          <a:p>
-            <a:pPr algn="r"/>
-            <a:r>
-              <a:rPr lang="ko-KR" altLang="en-US" sz="1600" spc="-150" dirty="0">
-                <a:latin typeface="에스코어 드림 3 Light" panose="020B0303030302020204" pitchFamily="34" charset="-127"/>
-                <a:ea typeface="에스코어 드림 3 Light" panose="020B0303030302020204" pitchFamily="34" charset="-127"/>
-              </a:rPr>
-              <a:t>지도 </a:t>
-            </a:r>
-            <a:r>
-              <a:rPr lang="ko-KR" altLang="en-US" sz="1600" spc="-150" dirty="0" err="1">
-                <a:latin typeface="에스코어 드림 3 Light" panose="020B0303030302020204" pitchFamily="34" charset="-127"/>
-                <a:ea typeface="에스코어 드림 3 Light" panose="020B0303030302020204" pitchFamily="34" charset="-127"/>
-              </a:rPr>
-              <a:t>이재흥</a:t>
-            </a:r>
-            <a:r>
-              <a:rPr lang="ko-KR" altLang="en-US" sz="1600" spc="-150" dirty="0">
-                <a:latin typeface="에스코어 드림 3 Light" panose="020B0303030302020204" pitchFamily="34" charset="-127"/>
-                <a:ea typeface="에스코어 드림 3 Light" panose="020B0303030302020204" pitchFamily="34" charset="-127"/>
-              </a:rPr>
-              <a:t> 교수님</a:t>
-            </a:r>
-          </a:p>
-        </p:txBody>
-      </p:sp>
       <p:sp>
         <p:nvSpPr>
           <p:cNvPr id="14" name="부제목 2">
